--- a/OrientDawn.pptx
+++ b/OrientDawn.pptx
@@ -7569,7 +7569,7 @@
             <a:fld id="{1D8BD707-D9CF-40AE-B4C6-C98DA3205C09}" type="datetimeFigureOut">
               <a:rPr lang="en-US" smtClean="0"/>
               <a:pPr/>
-              <a:t>6/4/2026</a:t>
+              <a:t>6/5/2026</a:t>
             </a:fld>
             <a:endParaRPr lang="en-US"/>
           </a:p>
@@ -11550,7 +11550,7 @@
             <a:fld id="{1D8BD707-D9CF-40AE-B4C6-C98DA3205C09}" type="datetimeFigureOut">
               <a:rPr lang="en-US" smtClean="0"/>
               <a:pPr/>
-              <a:t>6/4/2026</a:t>
+              <a:t>6/5/2026</a:t>
             </a:fld>
             <a:endParaRPr lang="en-US"/>
           </a:p>
@@ -11966,7 +11966,7 @@
             <a:fld id="{1D8BD707-D9CF-40AE-B4C6-C98DA3205C09}" type="datetimeFigureOut">
               <a:rPr lang="en-US" smtClean="0"/>
               <a:pPr/>
-              <a:t>6/4/2026</a:t>
+              <a:t>6/5/2026</a:t>
             </a:fld>
             <a:endParaRPr lang="en-US"/>
           </a:p>
@@ -14890,7 +14890,7 @@
             <a:fld id="{1D8BD707-D9CF-40AE-B4C6-C98DA3205C09}" type="datetimeFigureOut">
               <a:rPr lang="en-US" smtClean="0"/>
               <a:pPr/>
-              <a:t>6/4/2026</a:t>
+              <a:t>6/5/2026</a:t>
             </a:fld>
             <a:endParaRPr lang="en-US"/>
           </a:p>
@@ -15098,7 +15098,7 @@
             <a:fld id="{1D8BD707-D9CF-40AE-B4C6-C98DA3205C09}" type="datetimeFigureOut">
               <a:rPr lang="en-US" smtClean="0"/>
               <a:pPr/>
-              <a:t>6/4/2026</a:t>
+              <a:t>6/5/2026</a:t>
             </a:fld>
             <a:endParaRPr lang="en-US"/>
           </a:p>
@@ -19067,9 +19067,9 @@
           <p:grpSpPr>
             <a:xfrm>
               <a:off x="673100" y="2738482"/>
-              <a:ext cx="2335164" cy="2214518"/>
+              <a:ext cx="2335164" cy="2989218"/>
               <a:chOff x="673100" y="2738482"/>
-              <a:chExt cx="2335164" cy="2214518"/>
+              <a:chExt cx="2335164" cy="2989218"/>
             </a:xfrm>
           </p:grpSpPr>
           <p:sp>
@@ -19206,7 +19206,7 @@
             <p:spPr>
               <a:xfrm>
                 <a:off x="673100" y="4187827"/>
-                <a:ext cx="2335164" cy="765173"/>
+                <a:ext cx="2335164" cy="1539873"/>
               </a:xfrm>
               <a:prstGeom prst="rect">
                 <a:avLst/>
@@ -19227,7 +19227,7 @@
                   <a:defRPr/>
                 </a:pPr>
                 <a:r>
-                  <a:rPr lang="zh-CN" altLang="en-US" sz="1200" b="0" i="0" dirty="0">
+                  <a:rPr lang="zh-CN" altLang="en-US" sz="1200" dirty="0">
                     <a:ln/>
                     <a:solidFill>
                       <a:srgbClr val="2F2F2F">
@@ -19236,9 +19236,21 @@
                     </a:solidFill>
                     <a:latin typeface="微软雅黑"/>
                     <a:ea typeface="微软雅黑"/>
-                    <a:cs typeface="微软雅黑"/>
                   </a:rPr>
-                  <a:t>企业</a:t>
+                  <a:t>北京启明曙光科技有限公司正式成立，以</a:t>
+                </a:r>
+                <a:r>
+                  <a:rPr lang="en-US" altLang="zh-CN" sz="1200" dirty="0">
+                    <a:ln/>
+                    <a:solidFill>
+                      <a:srgbClr val="2F2F2F">
+                        <a:alpha val="100000"/>
+                      </a:srgbClr>
+                    </a:solidFill>
+                    <a:latin typeface="微软雅黑"/>
+                    <a:ea typeface="微软雅黑"/>
+                  </a:rPr>
+                  <a:t>"</a:t>
                 </a:r>
                 <a:r>
                   <a:rPr lang="zh-CN" altLang="en-US" sz="1200" dirty="0">
@@ -19250,9 +19262,8 @@
                     </a:solidFill>
                     <a:latin typeface="微软雅黑"/>
                     <a:ea typeface="微软雅黑"/>
-                    <a:cs typeface="微软雅黑"/>
                   </a:rPr>
-                  <a:t>网站开发及完成</a:t>
+                  <a:t>星星之火，可以燎原</a:t>
                 </a:r>
                 <a:r>
                   <a:rPr lang="en-US" altLang="zh-CN" sz="1200" dirty="0">
@@ -19264,9 +19275,8 @@
                     </a:solidFill>
                     <a:latin typeface="微软雅黑"/>
                     <a:ea typeface="微软雅黑"/>
-                    <a:cs typeface="微软雅黑"/>
                   </a:rPr>
-                  <a:t>ICP/</a:t>
+                  <a:t>"</a:t>
                 </a:r>
                 <a:r>
                   <a:rPr lang="zh-CN" altLang="en-US" sz="1200" dirty="0">
@@ -19278,25 +19288,19 @@
                     </a:solidFill>
                     <a:latin typeface="微软雅黑"/>
                     <a:ea typeface="微软雅黑"/>
-                    <a:cs typeface="微软雅黑"/>
                   </a:rPr>
-                  <a:t>公安网备案</a:t>
+                  <a:t>为精神信念，开启人工智能技术普惠之路。</a:t>
                 </a:r>
-                <a:r>
-                  <a:rPr lang="zh-CN" altLang="en-US" sz="1200" b="0" i="0" dirty="0">
-                    <a:ln/>
-                    <a:solidFill>
-                      <a:srgbClr val="2F2F2F">
-                        <a:alpha val="100000"/>
-                      </a:srgbClr>
-                    </a:solidFill>
-                    <a:latin typeface="微软雅黑"/>
-                    <a:ea typeface="微软雅黑"/>
-                    <a:cs typeface="微软雅黑"/>
-                  </a:rPr>
-                  <a:t>，当前企业正处于星火期。</a:t>
-                </a:r>
-                <a:endParaRPr lang="en-US" sz="1100" dirty="0"/>
+                <a:endParaRPr lang="en-US" sz="1200" dirty="0">
+                  <a:ln/>
+                  <a:solidFill>
+                    <a:srgbClr val="2F2F2F">
+                      <a:alpha val="100000"/>
+                    </a:srgbClr>
+                  </a:solidFill>
+                  <a:latin typeface="微软雅黑"/>
+                  <a:ea typeface="微软雅黑"/>
+                </a:endParaRPr>
               </a:p>
             </p:txBody>
           </p:sp>
@@ -19333,7 +19337,7 @@
                 </a:r>
                 <a:r>
                   <a:rPr lang="en-US" altLang="zh-CN" b="1" dirty="0"/>
-                  <a:t>2</a:t>
+                  <a:t>1</a:t>
                 </a:r>
                 <a:r>
                   <a:rPr lang="zh-CN" altLang="en-US" b="1" dirty="0"/>
@@ -19341,7 +19345,7 @@
                 </a:r>
                 <a:r>
                   <a:rPr lang="en-US" altLang="zh-CN" b="1" dirty="0"/>
-                  <a:t>9</a:t>
+                  <a:t>26</a:t>
                 </a:r>
                 <a:r>
                   <a:rPr lang="zh-CN" altLang="en-US" b="1" dirty="0"/>
@@ -19483,35 +19487,7 @@
                     <a:latin typeface="Arial"/>
                     <a:cs typeface="Arial"/>
                   </a:rPr>
-                  <a:t>明察之眼</a:t>
-                </a:r>
-                <a:endParaRPr lang="en-US" altLang="zh-CN" sz="1200" b="1" dirty="0">
-                  <a:ln/>
-                  <a:solidFill>
-                    <a:srgbClr val="2F2F2F">
-                      <a:alpha val="100000"/>
-                    </a:srgbClr>
-                  </a:solidFill>
-                  <a:latin typeface="Arial"/>
-                  <a:cs typeface="Arial"/>
-                </a:endParaRPr>
-              </a:p>
-              <a:p>
-                <a:pPr algn="ctr">
-                  <a:defRPr/>
-                </a:pPr>
-                <a:r>
-                  <a:rPr lang="zh-CN" altLang="en-US" sz="1200" b="1" dirty="0">
-                    <a:ln/>
-                    <a:solidFill>
-                      <a:srgbClr val="2F2F2F">
-                        <a:alpha val="100000"/>
-                      </a:srgbClr>
-                    </a:solidFill>
-                    <a:latin typeface="Arial"/>
-                    <a:cs typeface="Arial"/>
-                  </a:rPr>
-                  <a:t>铸剑</a:t>
+                  <a:t>合规里程碑</a:t>
                 </a:r>
                 <a:endParaRPr lang="en-US" sz="1200" b="1" dirty="0">
                   <a:ln/>
@@ -19569,7 +19545,7 @@
                     <a:latin typeface="微软雅黑"/>
                     <a:ea typeface="微软雅黑"/>
                   </a:rPr>
-                  <a:t>明察之眼网站设计，完善基础框架并补充设计理念，计划训练针对心理学、周易理论、生肖星座、</a:t>
+                  <a:t>企业网站顺利完成工信部</a:t>
                 </a:r>
                 <a:r>
                   <a:rPr lang="en-US" altLang="zh-CN" sz="1200" dirty="0">
@@ -19582,20 +19558,7 @@
                     <a:latin typeface="微软雅黑"/>
                     <a:ea typeface="微软雅黑"/>
                   </a:rPr>
-                  <a:t>MBTI</a:t>
-                </a:r>
-                <a:r>
-                  <a:rPr lang="zh-CN" altLang="en-US" sz="1200">
-                    <a:ln/>
-                    <a:solidFill>
-                      <a:srgbClr val="2F2F2F">
-                        <a:alpha val="100000"/>
-                      </a:srgbClr>
-                    </a:solidFill>
-                    <a:latin typeface="微软雅黑"/>
-                    <a:ea typeface="微软雅黑"/>
-                  </a:rPr>
-                  <a:t>人格、小</a:t>
+                  <a:t>ICP</a:t>
                 </a:r>
                 <a:r>
                   <a:rPr lang="zh-CN" altLang="en-US" sz="1200" dirty="0">
@@ -19608,7 +19571,7 @@
                     <a:latin typeface="微软雅黑"/>
                     <a:ea typeface="微软雅黑"/>
                   </a:rPr>
-                  <a:t>模型的准备工作。</a:t>
+                  <a:t>备案与公安网备案，正式开启线上品牌化运营之路。</a:t>
                 </a:r>
                 <a:endParaRPr lang="en-US" altLang="zh-CN" sz="1200" dirty="0">
                   <a:ln/>
@@ -19646,14 +19609,8 @@
               <a:bodyPr vert="horz" wrap="square" lIns="91440" tIns="45720" rIns="91440" bIns="45720" rtlCol="0" anchor="b" anchorCtr="1"/>
               <a:lstStyle/>
               <a:p>
-                <a:pPr>
-                  <a:spcBef>
-                    <a:spcPts val="0"/>
-                  </a:spcBef>
-                  <a:defRPr/>
-                </a:pPr>
                 <a:r>
-                  <a:rPr lang="en-US" b="1" dirty="0"/>
+                  <a:rPr lang="en-US" altLang="zh-CN" b="1" dirty="0"/>
                   <a:t>2026</a:t>
                 </a:r>
                 <a:r>
@@ -19662,7 +19619,7 @@
                 </a:r>
                 <a:r>
                   <a:rPr lang="en-US" altLang="zh-CN" b="1" dirty="0"/>
-                  <a:t>5</a:t>
+                  <a:t>2</a:t>
                 </a:r>
                 <a:r>
                   <a:rPr lang="zh-CN" altLang="en-US" b="1" dirty="0"/>
@@ -19670,13 +19627,12 @@
                 </a:r>
                 <a:r>
                   <a:rPr lang="en-US" altLang="zh-CN" b="1" dirty="0"/>
-                  <a:t>15</a:t>
+                  <a:t>9</a:t>
                 </a:r>
                 <a:r>
                   <a:rPr lang="zh-CN" altLang="en-US" b="1" dirty="0"/>
                   <a:t>日</a:t>
                 </a:r>
-                <a:endParaRPr lang="en-US" b="1" dirty="0"/>
               </a:p>
             </p:txBody>
           </p:sp>
@@ -19803,7 +19759,7 @@
                   <a:defRPr/>
                 </a:pPr>
                 <a:r>
-                  <a:rPr lang="en-US" sz="1800" b="0" i="0">
+                  <a:rPr lang="zh-CN" altLang="en-US" sz="1200" b="1" dirty="0">
                     <a:ln/>
                     <a:solidFill>
                       <a:srgbClr val="2F2F2F">
@@ -19811,12 +19767,20 @@
                       </a:srgbClr>
                     </a:solidFill>
                     <a:latin typeface="Arial"/>
-                    <a:ea typeface="Arial"/>
                     <a:cs typeface="Arial"/>
                   </a:rPr>
-                  <a:t>03</a:t>
+                  <a:t>产品里程碑</a:t>
                 </a:r>
-                <a:endParaRPr lang="en-US" sz="1100"/>
+                <a:endParaRPr lang="en-US" sz="1200" b="1" dirty="0">
+                  <a:ln/>
+                  <a:solidFill>
+                    <a:srgbClr val="2F2F2F">
+                      <a:alpha val="100000"/>
+                    </a:srgbClr>
+                  </a:solidFill>
+                  <a:latin typeface="Arial"/>
+                  <a:cs typeface="Arial"/>
+                </a:endParaRPr>
               </a:p>
             </p:txBody>
           </p:sp>
@@ -19844,13 +19808,13 @@
               <a:lstStyle/>
               <a:p>
                 <a:pPr algn="ctr">
-                  <a:spcBef>
-                    <a:spcPts val="0"/>
-                  </a:spcBef>
+                  <a:lnSpc>
+                    <a:spcPct val="120000"/>
+                  </a:lnSpc>
                   <a:defRPr/>
                 </a:pPr>
                 <a:r>
-                  <a:rPr lang="zh-CN" altLang="en-US" sz="1200" b="1" dirty="0">
+                  <a:rPr lang="zh-CN" altLang="en-US" sz="1200" dirty="0">
                     <a:ln/>
                     <a:solidFill>
                       <a:srgbClr val="2F2F2F">
@@ -19860,9 +19824,96 @@
                     <a:latin typeface="微软雅黑"/>
                     <a:ea typeface="微软雅黑"/>
                   </a:rPr>
-                  <a:t>待填</a:t>
+                  <a:t>明察之眼项目开始</a:t>
                 </a:r>
-                <a:endParaRPr lang="en-US" altLang="zh-CN" sz="900" dirty="0"/>
+                <a:r>
+                  <a:rPr lang="en-US" altLang="zh-CN" sz="1200" dirty="0">
+                    <a:ln/>
+                    <a:solidFill>
+                      <a:srgbClr val="2F2F2F">
+                        <a:alpha val="100000"/>
+                      </a:srgbClr>
+                    </a:solidFill>
+                    <a:latin typeface="微软雅黑"/>
+                    <a:ea typeface="微软雅黑"/>
+                  </a:rPr>
+                  <a:t>"</a:t>
+                </a:r>
+                <a:r>
+                  <a:rPr lang="zh-CN" altLang="en-US" sz="1200" dirty="0">
+                    <a:ln/>
+                    <a:solidFill>
+                      <a:srgbClr val="2F2F2F">
+                        <a:alpha val="100000"/>
+                      </a:srgbClr>
+                    </a:solidFill>
+                    <a:latin typeface="微软雅黑"/>
+                    <a:ea typeface="微软雅黑"/>
+                  </a:rPr>
+                  <a:t>铸剑</a:t>
+                </a:r>
+                <a:r>
+                  <a:rPr lang="en-US" altLang="zh-CN" sz="1200" dirty="0">
+                    <a:ln/>
+                    <a:solidFill>
+                      <a:srgbClr val="2F2F2F">
+                        <a:alpha val="100000"/>
+                      </a:srgbClr>
+                    </a:solidFill>
+                    <a:latin typeface="微软雅黑"/>
+                    <a:ea typeface="微软雅黑"/>
+                  </a:rPr>
+                  <a:t>"</a:t>
+                </a:r>
+                <a:r>
+                  <a:rPr lang="zh-CN" altLang="en-US" sz="1200" dirty="0">
+                    <a:ln/>
+                    <a:solidFill>
+                      <a:srgbClr val="2F2F2F">
+                        <a:alpha val="100000"/>
+                      </a:srgbClr>
+                    </a:solidFill>
+                    <a:latin typeface="微软雅黑"/>
+                    <a:ea typeface="微软雅黑"/>
+                  </a:rPr>
+                  <a:t>阶段，核心功能制定，情报研判、数据采集、</a:t>
+                </a:r>
+                <a:r>
+                  <a:rPr lang="en-US" altLang="zh-CN" sz="1200" dirty="0">
+                    <a:ln/>
+                    <a:solidFill>
+                      <a:srgbClr val="2F2F2F">
+                        <a:alpha val="100000"/>
+                      </a:srgbClr>
+                    </a:solidFill>
+                    <a:latin typeface="微软雅黑"/>
+                    <a:ea typeface="微软雅黑"/>
+                  </a:rPr>
+                  <a:t>AI </a:t>
+                </a:r>
+                <a:r>
+                  <a:rPr lang="zh-CN" altLang="en-US" sz="1200" dirty="0">
+                    <a:ln/>
+                    <a:solidFill>
+                      <a:srgbClr val="2F2F2F">
+                        <a:alpha val="100000"/>
+                      </a:srgbClr>
+                    </a:solidFill>
+                    <a:latin typeface="微软雅黑"/>
+                    <a:ea typeface="微软雅黑"/>
+                  </a:rPr>
+                  <a:t>分析等模块定型，完成技术闭环。</a:t>
+                </a:r>
+                <a:endParaRPr lang="en-US" altLang="zh-CN" sz="1200" dirty="0">
+                  <a:ln/>
+                  <a:solidFill>
+                    <a:srgbClr val="2F2F2F">
+                      <a:alpha val="100000"/>
+                    </a:srgbClr>
+                  </a:solidFill>
+                  <a:latin typeface="微软雅黑"/>
+                  <a:ea typeface="微软雅黑"/>
+                </a:endParaRPr>
               </a:p>
             </p:txBody>
           </p:sp>
@@ -19889,26 +19940,30 @@
               <a:bodyPr vert="horz" wrap="square" lIns="91440" tIns="45720" rIns="91440" bIns="45720" rtlCol="0" anchor="b" anchorCtr="1"/>
               <a:lstStyle/>
               <a:p>
-                <a:pPr algn="ctr">
-                  <a:spcBef>
-                    <a:spcPts val="0"/>
-                  </a:spcBef>
-                  <a:defRPr/>
-                </a:pPr>
                 <a:r>
-                  <a:rPr lang="zh-CN" altLang="en-US" b="1" dirty="0">
-                    <a:ln/>
-                    <a:solidFill>
-                      <a:srgbClr val="2F2F2F">
-                        <a:alpha val="100000"/>
-                      </a:srgbClr>
-                    </a:solidFill>
-                    <a:latin typeface="微软雅黑"/>
-                    <a:ea typeface="微软雅黑"/>
-                  </a:rPr>
-                  <a:t>待填</a:t>
+                  <a:rPr lang="en-US" altLang="zh-CN" b="1" dirty="0"/>
+                  <a:t>2026</a:t>
                 </a:r>
-                <a:endParaRPr lang="en-US" altLang="zh-CN" sz="1100" dirty="0"/>
+                <a:r>
+                  <a:rPr lang="zh-CN" altLang="en-US" b="1" dirty="0"/>
+                  <a:t>年</a:t>
+                </a:r>
+                <a:r>
+                  <a:rPr lang="en-US" altLang="zh-CN" b="1" dirty="0"/>
+                  <a:t>3</a:t>
+                </a:r>
+                <a:r>
+                  <a:rPr lang="zh-CN" altLang="en-US" b="1" dirty="0"/>
+                  <a:t>月</a:t>
+                </a:r>
+                <a:r>
+                  <a:rPr lang="en-US" altLang="zh-CN" b="1" dirty="0"/>
+                  <a:t>15</a:t>
+                </a:r>
+                <a:r>
+                  <a:rPr lang="zh-CN" altLang="en-US" b="1" dirty="0"/>
+                  <a:t>日</a:t>
+                </a:r>
               </a:p>
             </p:txBody>
           </p:sp>
@@ -20035,7 +20090,7 @@
                   <a:defRPr/>
                 </a:pPr>
                 <a:r>
-                  <a:rPr lang="en-US" sz="1800" b="0" i="0">
+                  <a:rPr lang="zh-CN" altLang="en-US" sz="1200" b="1" dirty="0">
                     <a:ln/>
                     <a:solidFill>
                       <a:srgbClr val="2F2F2F">
@@ -20043,12 +20098,20 @@
                       </a:srgbClr>
                     </a:solidFill>
                     <a:latin typeface="Arial"/>
-                    <a:ea typeface="Arial"/>
                     <a:cs typeface="Arial"/>
                   </a:rPr>
-                  <a:t>04</a:t>
+                  <a:t>铸剑</a:t>
                 </a:r>
-                <a:endParaRPr lang="en-US" sz="1100"/>
+                <a:endParaRPr lang="en-US" altLang="zh-CN" sz="1200" b="1" dirty="0">
+                  <a:ln/>
+                  <a:solidFill>
+                    <a:srgbClr val="2F2F2F">
+                      <a:alpha val="100000"/>
+                    </a:srgbClr>
+                  </a:solidFill>
+                  <a:latin typeface="Arial"/>
+                  <a:cs typeface="Arial"/>
+                </a:endParaRPr>
               </a:p>
             </p:txBody>
           </p:sp>
@@ -20076,13 +20139,16 @@
               <a:lstStyle/>
               <a:p>
                 <a:pPr algn="ctr">
+                  <a:lnSpc>
+                    <a:spcPct val="120000"/>
+                  </a:lnSpc>
                   <a:spcBef>
                     <a:spcPts val="0"/>
                   </a:spcBef>
                   <a:defRPr/>
                 </a:pPr>
                 <a:r>
-                  <a:rPr lang="zh-CN" altLang="en-US" sz="1200" b="1" dirty="0">
+                  <a:rPr lang="zh-CN" altLang="en-US" sz="1200" dirty="0">
                     <a:ln/>
                     <a:solidFill>
                       <a:srgbClr val="2F2F2F">
@@ -20092,9 +20158,44 @@
                     <a:latin typeface="微软雅黑"/>
                     <a:ea typeface="微软雅黑"/>
                   </a:rPr>
-                  <a:t>待填</a:t>
+                  <a:t>明察之眼网站设计，完善基础框架并补充设计理念，计划训练针对心理学、周易理论、生肖星座、</a:t>
                 </a:r>
-                <a:endParaRPr lang="en-US" altLang="zh-CN" sz="900" dirty="0"/>
+                <a:r>
+                  <a:rPr lang="en-US" altLang="zh-CN" sz="1200" dirty="0">
+                    <a:ln/>
+                    <a:solidFill>
+                      <a:srgbClr val="2F2F2F">
+                        <a:alpha val="100000"/>
+                      </a:srgbClr>
+                    </a:solidFill>
+                    <a:latin typeface="微软雅黑"/>
+                    <a:ea typeface="微软雅黑"/>
+                  </a:rPr>
+                  <a:t>MBTI</a:t>
+                </a:r>
+                <a:r>
+                  <a:rPr lang="zh-CN" altLang="en-US" sz="1200" dirty="0">
+                    <a:ln/>
+                    <a:solidFill>
+                      <a:srgbClr val="2F2F2F">
+                        <a:alpha val="100000"/>
+                      </a:srgbClr>
+                    </a:solidFill>
+                    <a:latin typeface="微软雅黑"/>
+                    <a:ea typeface="微软雅黑"/>
+                  </a:rPr>
+                  <a:t>人格、小模型的准备工作。</a:t>
+                </a:r>
+                <a:endParaRPr lang="en-US" altLang="zh-CN" sz="1200" dirty="0">
+                  <a:ln/>
+                  <a:solidFill>
+                    <a:srgbClr val="2F2F2F">
+                      <a:alpha val="100000"/>
+                    </a:srgbClr>
+                  </a:solidFill>
+                  <a:latin typeface="微软雅黑"/>
+                  <a:ea typeface="微软雅黑"/>
+                </a:endParaRPr>
               </a:p>
             </p:txBody>
           </p:sp>
@@ -20121,26 +20222,37 @@
               <a:bodyPr vert="horz" wrap="square" lIns="91440" tIns="45720" rIns="91440" bIns="45720" rtlCol="0" anchor="b" anchorCtr="1"/>
               <a:lstStyle/>
               <a:p>
-                <a:pPr algn="ctr">
+                <a:pPr>
                   <a:spcBef>
                     <a:spcPts val="0"/>
                   </a:spcBef>
                   <a:defRPr/>
                 </a:pPr>
                 <a:r>
-                  <a:rPr lang="zh-CN" altLang="en-US" b="1" dirty="0">
-                    <a:ln/>
-                    <a:solidFill>
-                      <a:srgbClr val="2F2F2F">
-                        <a:alpha val="100000"/>
-                      </a:srgbClr>
-                    </a:solidFill>
-                    <a:latin typeface="微软雅黑"/>
-                    <a:ea typeface="微软雅黑"/>
-                  </a:rPr>
-                  <a:t>待填</a:t>
+                  <a:rPr lang="en-US" altLang="zh-CN" b="1" dirty="0"/>
+                  <a:t>2026</a:t>
                 </a:r>
-                <a:endParaRPr lang="en-US" altLang="zh-CN" sz="1100" dirty="0"/>
+                <a:r>
+                  <a:rPr lang="zh-CN" altLang="en-US" b="1" dirty="0"/>
+                  <a:t>年</a:t>
+                </a:r>
+                <a:r>
+                  <a:rPr lang="en-US" altLang="zh-CN" b="1" dirty="0"/>
+                  <a:t>5</a:t>
+                </a:r>
+                <a:r>
+                  <a:rPr lang="zh-CN" altLang="en-US" b="1" dirty="0"/>
+                  <a:t>月</a:t>
+                </a:r>
+                <a:r>
+                  <a:rPr lang="en-US" altLang="zh-CN" b="1" dirty="0"/>
+                  <a:t>15</a:t>
+                </a:r>
+                <a:r>
+                  <a:rPr lang="zh-CN" altLang="en-US" b="1" dirty="0"/>
+                  <a:t>日</a:t>
+                </a:r>
+                <a:endParaRPr lang="en-US" altLang="zh-CN" b="1" dirty="0"/>
               </a:p>
             </p:txBody>
           </p:sp>
